--- a/lessons/1-6/slides.pptx
+++ b/lessons/1-6/slides.pptx
@@ -10905,7 +10905,7 @@
       </p:sp>
       <p:sp>
         <p:nvSpPr>
-          <p:cNvPr id="20" name="Shape 18"/>
+          <p:cNvPr id="20" name="Text 18"/>
           <p:cNvSpPr/>
           <p:nvPr/>
         </p:nvSpPr>
@@ -10926,33 +10926,7 @@
             <a:solidFill>
               <a:srgbClr val="D6DBDF"/>
             </a:solidFill>
-            <a:prstDash val="solid"/>
           </a:ln>
-          <a:effectLst>
-            <a:outerShdw sx="100000" sy="100000" kx="0" ky="0" algn="bl" rotWithShape="0" blurRad="50800" dist="12700" dir="5400000">
-              <a:srgbClr val="1C2E42">
-                <a:alpha val="10000"/>
-              </a:srgbClr>
-            </a:outerShdw>
-          </a:effectLst>
-        </p:spPr>
-      </p:sp>
-      <p:sp>
-        <p:nvSpPr>
-          <p:cNvPr id="21" name="Text 19"/>
-          <p:cNvSpPr/>
-          <p:nvPr/>
-        </p:nvSpPr>
-        <p:spPr>
-          <a:xfrm>
-            <a:off x="685800" y="1481328"/>
-            <a:ext cx="1447800" cy="384048"/>
-          </a:xfrm>
-          <a:prstGeom prst="rect">
-            <a:avLst/>
-          </a:prstGeom>
-          <a:noFill/>
-          <a:ln/>
         </p:spPr>
         <p:txBody>
           <a:bodyPr wrap="square" rtlCol="0" anchor="ctr"/>
@@ -10962,7 +10936,7 @@
               <a:buNone/>
             </a:pPr>
             <a:r>
-              <a:rPr lang="en-US" sz="900" dirty="0">
+              <a:rPr lang="en-US" sz="900" b="1" dirty="0">
                 <a:solidFill>
                   <a:srgbClr val="17324D"/>
                 </a:solidFill>
@@ -10978,7 +10952,7 @@
       </p:sp>
       <p:sp>
         <p:nvSpPr>
-          <p:cNvPr id="22" name="Shape 20"/>
+          <p:cNvPr id="21" name="Text 19"/>
           <p:cNvSpPr/>
           <p:nvPr/>
         </p:nvSpPr>
@@ -10999,33 +10973,7 @@
             <a:solidFill>
               <a:srgbClr val="D6DBDF"/>
             </a:solidFill>
-            <a:prstDash val="solid"/>
           </a:ln>
-          <a:effectLst>
-            <a:outerShdw sx="100000" sy="100000" kx="0" ky="0" algn="bl" rotWithShape="0" blurRad="50800" dist="12700" dir="5400000">
-              <a:srgbClr val="1C2E42">
-                <a:alpha val="10000"/>
-              </a:srgbClr>
-            </a:outerShdw>
-          </a:effectLst>
-        </p:spPr>
-      </p:sp>
-      <p:sp>
-        <p:nvSpPr>
-          <p:cNvPr id="23" name="Text 21"/>
-          <p:cNvSpPr/>
-          <p:nvPr/>
-        </p:nvSpPr>
-        <p:spPr>
-          <a:xfrm>
-            <a:off x="2453640" y="1481328"/>
-            <a:ext cx="1447800" cy="384048"/>
-          </a:xfrm>
-          <a:prstGeom prst="rect">
-            <a:avLst/>
-          </a:prstGeom>
-          <a:noFill/>
-          <a:ln/>
         </p:spPr>
         <p:txBody>
           <a:bodyPr wrap="square" rtlCol="0" anchor="ctr"/>
@@ -11035,7 +10983,7 @@
               <a:buNone/>
             </a:pPr>
             <a:r>
-              <a:rPr lang="en-US" sz="900" dirty="0">
+              <a:rPr lang="en-US" sz="900" b="1" dirty="0">
                 <a:solidFill>
                   <a:srgbClr val="17324D"/>
                 </a:solidFill>
@@ -11051,7 +10999,7 @@
       </p:sp>
       <p:sp>
         <p:nvSpPr>
-          <p:cNvPr id="24" name="Shape 22"/>
+          <p:cNvPr id="22" name="Text 20"/>
           <p:cNvSpPr/>
           <p:nvPr/>
         </p:nvSpPr>
@@ -11072,33 +11020,7 @@
             <a:solidFill>
               <a:srgbClr val="D6DBDF"/>
             </a:solidFill>
-            <a:prstDash val="solid"/>
           </a:ln>
-          <a:effectLst>
-            <a:outerShdw sx="100000" sy="100000" kx="0" ky="0" algn="bl" rotWithShape="0" blurRad="50800" dist="12700" dir="5400000">
-              <a:srgbClr val="1C2E42">
-                <a:alpha val="10000"/>
-              </a:srgbClr>
-            </a:outerShdw>
-          </a:effectLst>
-        </p:spPr>
-      </p:sp>
-      <p:sp>
-        <p:nvSpPr>
-          <p:cNvPr id="25" name="Text 23"/>
-          <p:cNvSpPr/>
-          <p:nvPr/>
-        </p:nvSpPr>
-        <p:spPr>
-          <a:xfrm>
-            <a:off x="4221480" y="1481328"/>
-            <a:ext cx="1447800" cy="384048"/>
-          </a:xfrm>
-          <a:prstGeom prst="rect">
-            <a:avLst/>
-          </a:prstGeom>
-          <a:noFill/>
-          <a:ln/>
         </p:spPr>
         <p:txBody>
           <a:bodyPr wrap="square" rtlCol="0" anchor="ctr"/>
@@ -11108,7 +11030,7 @@
               <a:buNone/>
             </a:pPr>
             <a:r>
-              <a:rPr lang="en-US" sz="900" dirty="0">
+              <a:rPr lang="en-US" sz="900" b="1" dirty="0">
                 <a:solidFill>
                   <a:srgbClr val="17324D"/>
                 </a:solidFill>
@@ -11124,7 +11046,7 @@
       </p:sp>
       <p:sp>
         <p:nvSpPr>
-          <p:cNvPr id="26" name="Shape 24"/>
+          <p:cNvPr id="23" name="Text 21"/>
           <p:cNvSpPr/>
           <p:nvPr/>
         </p:nvSpPr>
@@ -11145,33 +11067,7 @@
             <a:solidFill>
               <a:srgbClr val="D6DBDF"/>
             </a:solidFill>
-            <a:prstDash val="solid"/>
           </a:ln>
-          <a:effectLst>
-            <a:outerShdw sx="100000" sy="100000" kx="0" ky="0" algn="bl" rotWithShape="0" blurRad="50800" dist="12700" dir="5400000">
-              <a:srgbClr val="1C2E42">
-                <a:alpha val="10000"/>
-              </a:srgbClr>
-            </a:outerShdw>
-          </a:effectLst>
-        </p:spPr>
-      </p:sp>
-      <p:sp>
-        <p:nvSpPr>
-          <p:cNvPr id="27" name="Text 25"/>
-          <p:cNvSpPr/>
-          <p:nvPr/>
-        </p:nvSpPr>
-        <p:spPr>
-          <a:xfrm>
-            <a:off x="685800" y="1975104"/>
-            <a:ext cx="1447800" cy="384048"/>
-          </a:xfrm>
-          <a:prstGeom prst="rect">
-            <a:avLst/>
-          </a:prstGeom>
-          <a:noFill/>
-          <a:ln/>
         </p:spPr>
         <p:txBody>
           <a:bodyPr wrap="square" rtlCol="0" anchor="ctr"/>
@@ -11181,7 +11077,7 @@
               <a:buNone/>
             </a:pPr>
             <a:r>
-              <a:rPr lang="en-US" sz="900" dirty="0">
+              <a:rPr lang="en-US" sz="900" b="1" dirty="0">
                 <a:solidFill>
                   <a:srgbClr val="17324D"/>
                 </a:solidFill>
@@ -11197,7 +11093,7 @@
       </p:sp>
       <p:sp>
         <p:nvSpPr>
-          <p:cNvPr id="28" name="Shape 26"/>
+          <p:cNvPr id="24" name="Text 22"/>
           <p:cNvSpPr/>
           <p:nvPr/>
         </p:nvSpPr>
@@ -11218,33 +11114,7 @@
             <a:solidFill>
               <a:srgbClr val="D6DBDF"/>
             </a:solidFill>
-            <a:prstDash val="solid"/>
           </a:ln>
-          <a:effectLst>
-            <a:outerShdw sx="100000" sy="100000" kx="0" ky="0" algn="bl" rotWithShape="0" blurRad="50800" dist="12700" dir="5400000">
-              <a:srgbClr val="1C2E42">
-                <a:alpha val="10000"/>
-              </a:srgbClr>
-            </a:outerShdw>
-          </a:effectLst>
-        </p:spPr>
-      </p:sp>
-      <p:sp>
-        <p:nvSpPr>
-          <p:cNvPr id="29" name="Text 27"/>
-          <p:cNvSpPr/>
-          <p:nvPr/>
-        </p:nvSpPr>
-        <p:spPr>
-          <a:xfrm>
-            <a:off x="2453640" y="1975104"/>
-            <a:ext cx="1447800" cy="384048"/>
-          </a:xfrm>
-          <a:prstGeom prst="rect">
-            <a:avLst/>
-          </a:prstGeom>
-          <a:noFill/>
-          <a:ln/>
         </p:spPr>
         <p:txBody>
           <a:bodyPr wrap="square" rtlCol="0" anchor="ctr"/>
@@ -11254,7 +11124,7 @@
               <a:buNone/>
             </a:pPr>
             <a:r>
-              <a:rPr lang="en-US" sz="900" dirty="0">
+              <a:rPr lang="en-US" sz="900" b="1" dirty="0">
                 <a:solidFill>
                   <a:srgbClr val="17324D"/>
                 </a:solidFill>
@@ -11270,7 +11140,7 @@
       </p:sp>
       <p:sp>
         <p:nvSpPr>
-          <p:cNvPr id="30" name="Shape 28"/>
+          <p:cNvPr id="25" name="Text 23"/>
           <p:cNvSpPr/>
           <p:nvPr/>
         </p:nvSpPr>
@@ -11291,33 +11161,7 @@
             <a:solidFill>
               <a:srgbClr val="D6DBDF"/>
             </a:solidFill>
-            <a:prstDash val="solid"/>
           </a:ln>
-          <a:effectLst>
-            <a:outerShdw sx="100000" sy="100000" kx="0" ky="0" algn="bl" rotWithShape="0" blurRad="50800" dist="12700" dir="5400000">
-              <a:srgbClr val="1C2E42">
-                <a:alpha val="10000"/>
-              </a:srgbClr>
-            </a:outerShdw>
-          </a:effectLst>
-        </p:spPr>
-      </p:sp>
-      <p:sp>
-        <p:nvSpPr>
-          <p:cNvPr id="31" name="Text 29"/>
-          <p:cNvSpPr/>
-          <p:nvPr/>
-        </p:nvSpPr>
-        <p:spPr>
-          <a:xfrm>
-            <a:off x="4221480" y="1975104"/>
-            <a:ext cx="1447800" cy="384048"/>
-          </a:xfrm>
-          <a:prstGeom prst="rect">
-            <a:avLst/>
-          </a:prstGeom>
-          <a:noFill/>
-          <a:ln/>
         </p:spPr>
         <p:txBody>
           <a:bodyPr wrap="square" rtlCol="0" anchor="ctr"/>
@@ -11327,7 +11171,7 @@
               <a:buNone/>
             </a:pPr>
             <a:r>
-              <a:rPr lang="en-US" sz="900" dirty="0">
+              <a:rPr lang="en-US" sz="900" b="1" dirty="0">
                 <a:solidFill>
                   <a:srgbClr val="17324D"/>
                 </a:solidFill>
@@ -11343,7 +11187,7 @@
       </p:sp>
       <p:sp>
         <p:nvSpPr>
-          <p:cNvPr id="32" name="Shape 30"/>
+          <p:cNvPr id="26" name="Shape 24"/>
           <p:cNvSpPr/>
           <p:nvPr/>
         </p:nvSpPr>
@@ -11377,7 +11221,7 @@
       </p:sp>
       <p:sp>
         <p:nvSpPr>
-          <p:cNvPr id="33" name="Text 31"/>
+          <p:cNvPr id="27" name="Text 25"/>
           <p:cNvSpPr/>
           <p:nvPr/>
         </p:nvSpPr>
@@ -11418,7 +11262,7 @@
       </p:sp>
       <p:sp>
         <p:nvSpPr>
-          <p:cNvPr id="34" name="Shape 32"/>
+          <p:cNvPr id="28" name="Shape 26"/>
           <p:cNvSpPr/>
           <p:nvPr/>
         </p:nvSpPr>
@@ -11452,7 +11296,7 @@
       </p:sp>
       <p:sp>
         <p:nvSpPr>
-          <p:cNvPr id="35" name="Text 33"/>
+          <p:cNvPr id="29" name="Text 27"/>
           <p:cNvSpPr/>
           <p:nvPr/>
         </p:nvSpPr>
@@ -11493,7 +11337,7 @@
       </p:sp>
       <p:sp>
         <p:nvSpPr>
-          <p:cNvPr id="36" name="Shape 34"/>
+          <p:cNvPr id="30" name="Shape 28"/>
           <p:cNvSpPr/>
           <p:nvPr/>
         </p:nvSpPr>
@@ -11527,7 +11371,7 @@
       </p:sp>
       <p:sp>
         <p:nvSpPr>
-          <p:cNvPr id="37" name="Text 35"/>
+          <p:cNvPr id="31" name="Text 29"/>
           <p:cNvSpPr/>
           <p:nvPr/>
         </p:nvSpPr>
@@ -11568,7 +11412,7 @@
       </p:sp>
       <p:sp>
         <p:nvSpPr>
-          <p:cNvPr id="38" name="Text 36"/>
+          <p:cNvPr id="32" name="Text 30"/>
           <p:cNvSpPr/>
           <p:nvPr/>
         </p:nvSpPr>
@@ -11607,7 +11451,7 @@
       </p:sp>
       <p:sp>
         <p:nvSpPr>
-          <p:cNvPr id="39" name="Shape 37"/>
+          <p:cNvPr id="33" name="Shape 31"/>
           <p:cNvSpPr/>
           <p:nvPr/>
         </p:nvSpPr>
@@ -11630,7 +11474,7 @@
       </p:sp>
       <p:sp>
         <p:nvSpPr>
-          <p:cNvPr id="40" name="Shape 38"/>
+          <p:cNvPr id="34" name="Shape 32"/>
           <p:cNvSpPr/>
           <p:nvPr/>
         </p:nvSpPr>
@@ -11653,7 +11497,7 @@
       </p:sp>
       <p:sp>
         <p:nvSpPr>
-          <p:cNvPr id="41" name="Shape 39"/>
+          <p:cNvPr id="35" name="Shape 33"/>
           <p:cNvSpPr/>
           <p:nvPr/>
         </p:nvSpPr>
@@ -11676,7 +11520,7 @@
       </p:sp>
       <p:sp>
         <p:nvSpPr>
-          <p:cNvPr id="42" name="Shape 40"/>
+          <p:cNvPr id="36" name="Shape 34"/>
           <p:cNvSpPr/>
           <p:nvPr/>
         </p:nvSpPr>
@@ -11699,7 +11543,7 @@
       </p:sp>
       <p:sp>
         <p:nvSpPr>
-          <p:cNvPr id="43" name="Shape 41"/>
+          <p:cNvPr id="37" name="Shape 35"/>
           <p:cNvSpPr/>
           <p:nvPr/>
         </p:nvSpPr>

--- a/lessons/1-6/slides.pptx
+++ b/lessons/1-6/slides.pptx
@@ -2584,7 +2584,7 @@
                 <a:ea typeface="Outfit" pitchFamily="34" charset="-122"/>
                 <a:cs typeface="Outfit" pitchFamily="34" charset="-120"/>
               </a:rPr>
-              <a:t>6.NS.3</a:t>
+              <a:t>6.NOS.3</a:t>
             </a:r>
             <a:endParaRPr lang="en-US" sz="1000" dirty="0"/>
           </a:p>
@@ -3307,7 +3307,7 @@
                 <a:ea typeface="Outfit" pitchFamily="34" charset="-122"/>
                 <a:cs typeface="Outfit" pitchFamily="34" charset="-120"/>
               </a:rPr>
-              <a:t>6.NS.3</a:t>
+              <a:t>6.NOS.3</a:t>
             </a:r>
             <a:endParaRPr lang="en-US" sz="900" dirty="0"/>
           </a:p>
@@ -4436,7 +4436,7 @@
                 <a:ea typeface="Outfit" pitchFamily="34" charset="-122"/>
                 <a:cs typeface="Outfit" pitchFamily="34" charset="-120"/>
               </a:rPr>
-              <a:t>6.NS.3</a:t>
+              <a:t>6.NOS.3</a:t>
             </a:r>
             <a:endParaRPr lang="en-US" sz="900" dirty="0"/>
           </a:p>
@@ -5640,7 +5640,7 @@
                 <a:ea typeface="Outfit" pitchFamily="34" charset="-122"/>
                 <a:cs typeface="Outfit" pitchFamily="34" charset="-120"/>
               </a:rPr>
-              <a:t>6.NS.3</a:t>
+              <a:t>6.NOS.3</a:t>
             </a:r>
             <a:endParaRPr lang="en-US" sz="900" dirty="0"/>
           </a:p>
@@ -6976,7 +6976,7 @@
                 <a:ea typeface="Outfit" pitchFamily="34" charset="-122"/>
                 <a:cs typeface="Outfit" pitchFamily="34" charset="-120"/>
               </a:rPr>
-              <a:t>6.NS.3</a:t>
+              <a:t>6.NOS.3</a:t>
             </a:r>
             <a:endParaRPr lang="en-US" sz="900" dirty="0"/>
           </a:p>
@@ -8270,7 +8270,7 @@
                 <a:ea typeface="Outfit" pitchFamily="34" charset="-122"/>
                 <a:cs typeface="Outfit" pitchFamily="34" charset="-120"/>
               </a:rPr>
-              <a:t>6.NS.3</a:t>
+              <a:t>6.NOS.3</a:t>
             </a:r>
             <a:endParaRPr lang="en-US" sz="900" dirty="0"/>
           </a:p>
@@ -9332,7 +9332,7 @@
                 <a:ea typeface="Outfit" pitchFamily="34" charset="-122"/>
                 <a:cs typeface="Outfit" pitchFamily="34" charset="-120"/>
               </a:rPr>
-              <a:t>6.NS.3</a:t>
+              <a:t>6.NOS.3</a:t>
             </a:r>
             <a:endParaRPr lang="en-US" sz="900" dirty="0"/>
           </a:p>
@@ -10297,7 +10297,7 @@
                 <a:ea typeface="Outfit" pitchFamily="34" charset="-122"/>
                 <a:cs typeface="Outfit" pitchFamily="34" charset="-120"/>
               </a:rPr>
-              <a:t>6.NS.3</a:t>
+              <a:t>6.NOS.3</a:t>
             </a:r>
             <a:endParaRPr lang="en-US" sz="900" dirty="0"/>
           </a:p>
@@ -11214,7 +11214,7 @@
                 <a:ea typeface="Outfit" pitchFamily="34" charset="-122"/>
                 <a:cs typeface="Outfit" pitchFamily="34" charset="-120"/>
               </a:rPr>
-              <a:t>6.NS.3</a:t>
+              <a:t>6.NOS.3</a:t>
             </a:r>
             <a:endParaRPr lang="en-US" sz="900" dirty="0"/>
           </a:p>
@@ -12342,7 +12342,7 @@
                 <a:ea typeface="Outfit" pitchFamily="34" charset="-122"/>
                 <a:cs typeface="Outfit" pitchFamily="34" charset="-120"/>
               </a:rPr>
-              <a:t>6.NS.3</a:t>
+              <a:t>6.NOS.3</a:t>
             </a:r>
             <a:endParaRPr lang="en-US" sz="900" dirty="0"/>
           </a:p>
@@ -13775,7 +13775,7 @@
                 <a:ea typeface="Outfit" pitchFamily="34" charset="-122"/>
                 <a:cs typeface="Outfit" pitchFamily="34" charset="-120"/>
               </a:rPr>
-              <a:t>6.NS.3</a:t>
+              <a:t>6.NOS.3</a:t>
             </a:r>
             <a:endParaRPr lang="en-US" sz="900" dirty="0"/>
           </a:p>
@@ -14589,7 +14589,7 @@
                 <a:ea typeface="Outfit" pitchFamily="34" charset="-122"/>
                 <a:cs typeface="Outfit" pitchFamily="34" charset="-120"/>
               </a:rPr>
-              <a:t>6.NS.3</a:t>
+              <a:t>6.NOS.3</a:t>
             </a:r>
             <a:endParaRPr lang="en-US" sz="900" dirty="0"/>
           </a:p>
@@ -15696,7 +15696,7 @@
                 <a:ea typeface="Outfit" pitchFamily="34" charset="-122"/>
                 <a:cs typeface="Outfit" pitchFamily="34" charset="-120"/>
               </a:rPr>
-              <a:t>6.NS.3</a:t>
+              <a:t>6.NOS.3</a:t>
             </a:r>
             <a:endParaRPr lang="en-US" sz="900" dirty="0"/>
           </a:p>
@@ -16803,7 +16803,7 @@
                 <a:ea typeface="Outfit" pitchFamily="34" charset="-122"/>
                 <a:cs typeface="Outfit" pitchFamily="34" charset="-120"/>
               </a:rPr>
-              <a:t>6.NS.3</a:t>
+              <a:t>6.NOS.3</a:t>
             </a:r>
             <a:endParaRPr lang="en-US" sz="900" dirty="0"/>
           </a:p>
@@ -17910,7 +17910,7 @@
                 <a:ea typeface="Outfit" pitchFamily="34" charset="-122"/>
                 <a:cs typeface="Outfit" pitchFamily="34" charset="-120"/>
               </a:rPr>
-              <a:t>6.NS.3</a:t>
+              <a:t>6.NOS.3</a:t>
             </a:r>
             <a:endParaRPr lang="en-US" sz="900" dirty="0"/>
           </a:p>
@@ -19017,7 +19017,7 @@
                 <a:ea typeface="Outfit" pitchFamily="34" charset="-122"/>
                 <a:cs typeface="Outfit" pitchFamily="34" charset="-120"/>
               </a:rPr>
-              <a:t>6.NS.3</a:t>
+              <a:t>6.NOS.3</a:t>
             </a:r>
             <a:endParaRPr lang="en-US" sz="900" dirty="0"/>
           </a:p>
@@ -19763,7 +19763,7 @@
                 <a:ea typeface="Hanken Grotesk" pitchFamily="34" charset="-122"/>
                 <a:cs typeface="Hanken Grotesk" pitchFamily="34" charset="-120"/>
               </a:rPr>
-              <a:t>Product</a:t>
+              <a:t>product</a:t>
             </a:r>
             <a:endParaRPr lang="en-US" sz="900" dirty="0"/>
           </a:p>
@@ -19810,7 +19810,7 @@
                 <a:ea typeface="Hanken Grotesk" pitchFamily="34" charset="-122"/>
                 <a:cs typeface="Hanken Grotesk" pitchFamily="34" charset="-120"/>
               </a:rPr>
-              <a:t>Decimal point</a:t>
+              <a:t>decimal point</a:t>
             </a:r>
             <a:endParaRPr lang="en-US" sz="900" dirty="0"/>
           </a:p>
@@ -19857,7 +19857,7 @@
                 <a:ea typeface="Hanken Grotesk" pitchFamily="34" charset="-122"/>
                 <a:cs typeface="Hanken Grotesk" pitchFamily="34" charset="-120"/>
               </a:rPr>
-              <a:t>Estimate</a:t>
+              <a:t>estimate</a:t>
             </a:r>
             <a:endParaRPr lang="en-US" sz="900" dirty="0"/>
           </a:p>
@@ -19904,7 +19904,54 @@
                 <a:ea typeface="Hanken Grotesk" pitchFamily="34" charset="-122"/>
                 <a:cs typeface="Hanken Grotesk" pitchFamily="34" charset="-120"/>
               </a:rPr>
-              <a:t>Place value</a:t>
+              <a:t>place value</a:t>
+            </a:r>
+            <a:endParaRPr lang="en-US" sz="900" dirty="0"/>
+          </a:p>
+        </p:txBody>
+      </p:sp>
+      <p:sp>
+        <p:nvSpPr>
+          <p:cNvPr id="32" name="Text 30"/>
+          <p:cNvSpPr/>
+          <p:nvPr/>
+        </p:nvSpPr>
+        <p:spPr>
+          <a:xfrm>
+            <a:off x="6263640" y="3666744"/>
+            <a:ext cx="1120140" cy="329184"/>
+          </a:xfrm>
+          <a:prstGeom prst="roundRect">
+            <a:avLst>
+              <a:gd name="adj" fmla="val 13889"/>
+            </a:avLst>
+          </a:prstGeom>
+          <a:solidFill>
+            <a:srgbClr val="FFFFFF"/>
+          </a:solidFill>
+          <a:ln w="12700">
+            <a:solidFill>
+              <a:srgbClr val="D6DBDF"/>
+            </a:solidFill>
+          </a:ln>
+        </p:spPr>
+        <p:txBody>
+          <a:bodyPr wrap="square" rtlCol="0" anchor="ctr"/>
+          <a:lstStyle/>
+          <a:p>
+            <a:pPr algn="ctr" indent="0" marL="0">
+              <a:buNone/>
+            </a:pPr>
+            <a:r>
+              <a:rPr lang="en-US" sz="900" b="1" dirty="0">
+                <a:solidFill>
+                  <a:srgbClr val="17324D"/>
+                </a:solidFill>
+                <a:latin typeface="Hanken Grotesk" pitchFamily="34" charset="0"/>
+                <a:ea typeface="Hanken Grotesk" pitchFamily="34" charset="-122"/>
+                <a:cs typeface="Hanken Grotesk" pitchFamily="34" charset="-120"/>
+              </a:rPr>
+              <a:t>decimal places</a:t>
             </a:r>
             <a:endParaRPr lang="en-US" sz="900" dirty="0"/>
           </a:p>
@@ -20077,7 +20124,7 @@
                 <a:ea typeface="Outfit" pitchFamily="34" charset="-122"/>
                 <a:cs typeface="Outfit" pitchFamily="34" charset="-120"/>
               </a:rPr>
-              <a:t>6.NS.3</a:t>
+              <a:t>6.NOS.3</a:t>
             </a:r>
             <a:endParaRPr lang="en-US" sz="900" dirty="0"/>
           </a:p>
@@ -21045,7 +21092,7 @@
                 <a:ea typeface="Outfit" pitchFamily="34" charset="-122"/>
                 <a:cs typeface="Outfit" pitchFamily="34" charset="-120"/>
               </a:rPr>
-              <a:t>6.NS.3</a:t>
+              <a:t>6.NOS.3</a:t>
             </a:r>
             <a:endParaRPr lang="en-US" sz="900" dirty="0"/>
           </a:p>
